--- a/GeoParquet_Intro.pptx
+++ b/GeoParquet_Intro.pptx
@@ -465,6 +465,303 @@
           <a:bodyPr/>
           <a:lstStyle/>
           <a:p>
+            <a:pPr marL="0" marR="0" lvl="0" indent="0" algn="l" defTabSz="914400" rtl="0" eaLnBrk="1" fontAlgn="auto" latinLnBrk="0" hangingPunct="1">
+              <a:lnSpc>
+                <a:spcPct val="100000"/>
+              </a:lnSpc>
+              <a:spcBef>
+                <a:spcPts val="0"/>
+              </a:spcBef>
+              <a:spcAft>
+                <a:spcPts val="0"/>
+              </a:spcAft>
+              <a:buClrTx/>
+              <a:buSzTx/>
+              <a:buFontTx/>
+              <a:buNone/>
+              <a:tabLst/>
+              <a:defRPr/>
+            </a:pPr>
+            <a:r>
+              <a:rPr lang="en-US" sz="1200" b="1" i="0" kern="1200" dirty="0">
+                <a:solidFill>
+                  <a:schemeClr val="tx1"/>
+                </a:solidFill>
+                <a:effectLst/>
+                <a:latin typeface="+mn-lt"/>
+                <a:ea typeface="+mn-ea"/>
+                <a:cs typeface="+mn-cs"/>
+              </a:rPr>
+              <a:t>You can work with massive datasets directly from the cloud</a:t>
+            </a:r>
+          </a:p>
+          <a:p>
+            <a:pPr marL="0" marR="0" lvl="0" indent="0" algn="l" defTabSz="914400" rtl="0" eaLnBrk="1" fontAlgn="auto" latinLnBrk="0" hangingPunct="1">
+              <a:lnSpc>
+                <a:spcPct val="100000"/>
+              </a:lnSpc>
+              <a:spcBef>
+                <a:spcPts val="0"/>
+              </a:spcBef>
+              <a:spcAft>
+                <a:spcPts val="0"/>
+              </a:spcAft>
+              <a:buClrTx/>
+              <a:buSzTx/>
+              <a:buFontTx/>
+              <a:buNone/>
+              <a:tabLst/>
+              <a:defRPr/>
+            </a:pPr>
+            <a:r>
+              <a:rPr lang="en-US" sz="1200" b="1" i="0" kern="1200" dirty="0">
+                <a:solidFill>
+                  <a:schemeClr val="tx1"/>
+                </a:solidFill>
+                <a:effectLst/>
+                <a:latin typeface="+mn-lt"/>
+                <a:ea typeface="+mn-ea"/>
+                <a:cs typeface="+mn-cs"/>
+              </a:rPr>
+              <a:t>It enables interoperability across GIS and data engineering</a:t>
+            </a:r>
+          </a:p>
+          <a:p>
+            <a:r>
+              <a:rPr lang="en-US" sz="1200" b="0" i="0" kern="1200" dirty="0" err="1">
+                <a:solidFill>
+                  <a:schemeClr val="tx1"/>
+                </a:solidFill>
+                <a:effectLst/>
+                <a:latin typeface="+mn-lt"/>
+                <a:ea typeface="+mn-ea"/>
+                <a:cs typeface="+mn-cs"/>
+              </a:rPr>
+              <a:t>GeoParquet</a:t>
+            </a:r>
+            <a:r>
+              <a:rPr lang="en-US" sz="1200" b="0" i="0" kern="1200" dirty="0">
+                <a:solidFill>
+                  <a:schemeClr val="tx1"/>
+                </a:solidFill>
+                <a:effectLst/>
+                <a:latin typeface="+mn-lt"/>
+                <a:ea typeface="+mn-ea"/>
+                <a:cs typeface="+mn-cs"/>
+              </a:rPr>
+              <a:t> works seamlessly with:</a:t>
+            </a:r>
+          </a:p>
+          <a:p>
+            <a:pPr lvl="0"/>
+            <a:r>
+              <a:rPr lang="en-US" sz="1200" b="0" i="0" kern="1200" dirty="0" err="1">
+                <a:solidFill>
+                  <a:schemeClr val="tx1"/>
+                </a:solidFill>
+                <a:effectLst/>
+                <a:latin typeface="+mn-lt"/>
+                <a:ea typeface="+mn-ea"/>
+                <a:cs typeface="+mn-cs"/>
+              </a:rPr>
+              <a:t>Geopandas</a:t>
+            </a:r>
+            <a:endParaRPr lang="en-US" sz="1200" b="0" i="0" kern="1200" dirty="0">
+              <a:solidFill>
+                <a:schemeClr val="tx1"/>
+              </a:solidFill>
+              <a:effectLst/>
+              <a:latin typeface="+mn-lt"/>
+              <a:ea typeface="+mn-ea"/>
+              <a:cs typeface="+mn-cs"/>
+            </a:endParaRPr>
+          </a:p>
+          <a:p>
+            <a:pPr lvl="0"/>
+            <a:r>
+              <a:rPr lang="en-US" sz="1200" b="0" i="0" kern="1200" dirty="0">
+                <a:solidFill>
+                  <a:schemeClr val="tx1"/>
+                </a:solidFill>
+                <a:effectLst/>
+                <a:latin typeface="+mn-lt"/>
+                <a:ea typeface="+mn-ea"/>
+                <a:cs typeface="+mn-cs"/>
+              </a:rPr>
+              <a:t>GDAL</a:t>
+            </a:r>
+          </a:p>
+          <a:p>
+            <a:pPr lvl="0"/>
+            <a:r>
+              <a:rPr lang="en-US" sz="1200" b="0" i="0" kern="1200" dirty="0" err="1">
+                <a:solidFill>
+                  <a:schemeClr val="tx1"/>
+                </a:solidFill>
+                <a:effectLst/>
+                <a:latin typeface="+mn-lt"/>
+                <a:ea typeface="+mn-ea"/>
+                <a:cs typeface="+mn-cs"/>
+              </a:rPr>
+              <a:t>DuckDB</a:t>
+            </a:r>
+            <a:endParaRPr lang="en-US" sz="1200" b="0" i="0" kern="1200" dirty="0">
+              <a:solidFill>
+                <a:schemeClr val="tx1"/>
+              </a:solidFill>
+              <a:effectLst/>
+              <a:latin typeface="+mn-lt"/>
+              <a:ea typeface="+mn-ea"/>
+              <a:cs typeface="+mn-cs"/>
+            </a:endParaRPr>
+          </a:p>
+          <a:p>
+            <a:pPr lvl="0"/>
+            <a:r>
+              <a:rPr lang="en-US" sz="1200" b="0" i="0" kern="1200" dirty="0">
+                <a:solidFill>
+                  <a:schemeClr val="tx1"/>
+                </a:solidFill>
+                <a:effectLst/>
+                <a:latin typeface="+mn-lt"/>
+                <a:ea typeface="+mn-ea"/>
+                <a:cs typeface="+mn-cs"/>
+              </a:rPr>
+              <a:t>Apache Sedona</a:t>
+            </a:r>
+          </a:p>
+          <a:p>
+            <a:pPr lvl="0"/>
+            <a:r>
+              <a:rPr lang="en-US" sz="1200" b="0" i="0" kern="1200" dirty="0" err="1">
+                <a:solidFill>
+                  <a:schemeClr val="tx1"/>
+                </a:solidFill>
+                <a:effectLst/>
+                <a:latin typeface="+mn-lt"/>
+                <a:ea typeface="+mn-ea"/>
+                <a:cs typeface="+mn-cs"/>
+              </a:rPr>
+              <a:t>BigQuery</a:t>
+            </a:r>
+            <a:endParaRPr lang="en-US" sz="1200" b="0" i="0" kern="1200" dirty="0">
+              <a:solidFill>
+                <a:schemeClr val="tx1"/>
+              </a:solidFill>
+              <a:effectLst/>
+              <a:latin typeface="+mn-lt"/>
+              <a:ea typeface="+mn-ea"/>
+              <a:cs typeface="+mn-cs"/>
+            </a:endParaRPr>
+          </a:p>
+          <a:p>
+            <a:pPr lvl="0"/>
+            <a:r>
+              <a:rPr lang="en-US" sz="1200" b="0" i="0" kern="1200" dirty="0">
+                <a:solidFill>
+                  <a:schemeClr val="tx1"/>
+                </a:solidFill>
+                <a:effectLst/>
+                <a:latin typeface="+mn-lt"/>
+                <a:ea typeface="+mn-ea"/>
+                <a:cs typeface="+mn-cs"/>
+              </a:rPr>
+              <a:t>Snowflake</a:t>
+            </a:r>
+          </a:p>
+          <a:p>
+            <a:pPr lvl="0"/>
+            <a:r>
+              <a:rPr lang="en-US" sz="1200" b="0" i="0" kern="1200" dirty="0" err="1">
+                <a:solidFill>
+                  <a:schemeClr val="tx1"/>
+                </a:solidFill>
+                <a:effectLst/>
+                <a:latin typeface="+mn-lt"/>
+                <a:ea typeface="+mn-ea"/>
+                <a:cs typeface="+mn-cs"/>
+              </a:rPr>
+              <a:t>PyArrow</a:t>
+            </a:r>
+            <a:endParaRPr lang="en-US" sz="1200" b="0" i="0" kern="1200" dirty="0">
+              <a:solidFill>
+                <a:schemeClr val="tx1"/>
+              </a:solidFill>
+              <a:effectLst/>
+              <a:latin typeface="+mn-lt"/>
+              <a:ea typeface="+mn-ea"/>
+              <a:cs typeface="+mn-cs"/>
+            </a:endParaRPr>
+          </a:p>
+          <a:p>
+            <a:endParaRPr lang="en-US" dirty="0"/>
+          </a:p>
+          <a:p>
+            <a:pPr marL="0" marR="0" lvl="0" indent="0" algn="l" defTabSz="914400" rtl="0" eaLnBrk="1" fontAlgn="auto" latinLnBrk="0" hangingPunct="1">
+              <a:lnSpc>
+                <a:spcPct val="100000"/>
+              </a:lnSpc>
+              <a:spcBef>
+                <a:spcPts val="0"/>
+              </a:spcBef>
+              <a:spcAft>
+                <a:spcPts val="0"/>
+              </a:spcAft>
+              <a:buClrTx/>
+              <a:buSzTx/>
+              <a:buFontTx/>
+              <a:buNone/>
+              <a:tabLst/>
+              <a:defRPr/>
+            </a:pPr>
+            <a:r>
+              <a:rPr lang="en-US" sz="1200" b="1" i="0" kern="1200" dirty="0">
+                <a:solidFill>
+                  <a:schemeClr val="tx1"/>
+                </a:solidFill>
+                <a:effectLst/>
+                <a:latin typeface="+mn-lt"/>
+                <a:ea typeface="+mn-ea"/>
+                <a:cs typeface="+mn-cs"/>
+              </a:rPr>
+              <a:t>It unlocks true cloud-native spatial data lakes</a:t>
+            </a:r>
+          </a:p>
+          <a:p>
+            <a:pPr marL="0" marR="0" lvl="0" indent="0" algn="l" defTabSz="914400" rtl="0" eaLnBrk="1" fontAlgn="auto" latinLnBrk="0" hangingPunct="1">
+              <a:lnSpc>
+                <a:spcPct val="100000"/>
+              </a:lnSpc>
+              <a:spcBef>
+                <a:spcPts val="0"/>
+              </a:spcBef>
+              <a:spcAft>
+                <a:spcPts val="0"/>
+              </a:spcAft>
+              <a:buClrTx/>
+              <a:buSzTx/>
+              <a:buFontTx/>
+              <a:buNone/>
+              <a:tabLst/>
+              <a:defRPr/>
+            </a:pPr>
+            <a:r>
+              <a:rPr lang="en-US" sz="1200" b="1" i="0" kern="1200">
+                <a:solidFill>
+                  <a:schemeClr val="tx1"/>
+                </a:solidFill>
+                <a:effectLst/>
+                <a:latin typeface="+mn-lt"/>
+                <a:ea typeface="+mn-ea"/>
+                <a:cs typeface="+mn-cs"/>
+              </a:rPr>
+              <a:t>It is becoming the default format for vector data at scale</a:t>
+            </a:r>
+          </a:p>
+          <a:p>
+            <a:endParaRPr lang="en-US"/>
+          </a:p>
+          <a:p>
             <a:r>
               <a:rPr lang="en-US" dirty="0"/>
               <a:t>Recap: columnar foundation, native geo types in Parquet/Iceberg + GeoParquet 2.0, Esri Parquet feature layers beta, converging interoperable ecosystem.</a:t>
@@ -726,9 +1023,95 @@
           <a:bodyPr/>
           <a:lstStyle/>
           <a:p>
+            <a:pPr marL="171450" lvl="0" indent="-171450">
+              <a:buFont typeface="Arial" panose="020B0604020202020204" pitchFamily="34" charset="0"/>
+              <a:buChar char="•"/>
+            </a:pPr>
+            <a:r>
+              <a:rPr lang="en-US" sz="1200" b="0" i="0" kern="1200" dirty="0">
+                <a:solidFill>
+                  <a:schemeClr val="tx1"/>
+                </a:solidFill>
+                <a:effectLst/>
+                <a:latin typeface="+mn-lt"/>
+                <a:ea typeface="+mn-ea"/>
+                <a:cs typeface="+mn-cs"/>
+              </a:rPr>
+              <a:t>Reading only the columns you need</a:t>
+            </a:r>
+          </a:p>
+          <a:p>
+            <a:pPr marL="171450" lvl="0" indent="-171450">
+              <a:buFont typeface="Arial" panose="020B0604020202020204" pitchFamily="34" charset="0"/>
+              <a:buChar char="•"/>
+            </a:pPr>
+            <a:r>
+              <a:rPr lang="en-US" sz="1200" b="0" i="0" kern="1200" dirty="0">
+                <a:solidFill>
+                  <a:schemeClr val="tx1"/>
+                </a:solidFill>
+                <a:effectLst/>
+                <a:latin typeface="+mn-lt"/>
+                <a:ea typeface="+mn-ea"/>
+                <a:cs typeface="+mn-cs"/>
+              </a:rPr>
+              <a:t>Far more efficient queries</a:t>
+            </a:r>
+          </a:p>
+          <a:p>
+            <a:pPr marL="171450" lvl="0" indent="-171450">
+              <a:buFont typeface="Arial" panose="020B0604020202020204" pitchFamily="34" charset="0"/>
+              <a:buChar char="•"/>
+            </a:pPr>
+            <a:r>
+              <a:rPr lang="en-US" sz="1200" b="0" i="0" kern="1200" dirty="0">
+                <a:solidFill>
+                  <a:schemeClr val="tx1"/>
+                </a:solidFill>
+                <a:effectLst/>
+                <a:latin typeface="+mn-lt"/>
+                <a:ea typeface="+mn-ea"/>
+                <a:cs typeface="+mn-cs"/>
+              </a:rPr>
+              <a:t>Better compression</a:t>
+            </a:r>
+          </a:p>
+          <a:p>
+            <a:pPr marL="171450" lvl="0" indent="-171450">
+              <a:buFont typeface="Arial" panose="020B0604020202020204" pitchFamily="34" charset="0"/>
+              <a:buChar char="•"/>
+            </a:pPr>
+            <a:r>
+              <a:rPr lang="en-US" sz="1200" b="0" i="0" kern="1200" dirty="0">
+                <a:solidFill>
+                  <a:schemeClr val="tx1"/>
+                </a:solidFill>
+                <a:effectLst/>
+                <a:latin typeface="+mn-lt"/>
+                <a:ea typeface="+mn-ea"/>
+                <a:cs typeface="+mn-cs"/>
+              </a:rPr>
+              <a:t>The ability to skip huge parts of the dataset based on metadata</a:t>
+            </a:r>
+          </a:p>
+          <a:p>
+            <a:pPr marL="171450" lvl="0" indent="-171450">
+              <a:buFont typeface="Arial" panose="020B0604020202020204" pitchFamily="34" charset="0"/>
+              <a:buChar char="•"/>
+            </a:pPr>
             <a:r>
               <a:rPr lang="en-US" dirty="0"/>
-              <a:t>Optimizations (Hilbert ordering, ZSTD, bbox/statistics) yield 10-100x improvements in compression, I/O, and spatial query performance. Analytical workflows have moved off Shapefile for ~3 years. Shapefile limits: 10-char fields, 254-char values, no true NULL, ~2GB.</a:t>
+              <a:t>Optimizations (Hilbert ordering, ZSTD, bbox/statistics) yield 10-100x improvements in compression, I/O, and spatial query performance. </a:t>
+            </a:r>
+          </a:p>
+          <a:p>
+            <a:pPr marL="171450" lvl="0" indent="-171450">
+              <a:buFont typeface="Arial" panose="020B0604020202020204" pitchFamily="34" charset="0"/>
+              <a:buChar char="•"/>
+            </a:pPr>
+            <a:r>
+              <a:rPr lang="en-US" dirty="0"/>
+              <a:t>Analytical workflows have moved off Shapefile for ~3 years. Shapefile limits: 10-char fields, 254-char values, no true NULL, ~2GB.</a:t>
             </a:r>
           </a:p>
         </p:txBody>
@@ -7364,45 +7747,6 @@
       </p:grpSpPr>
       <p:sp>
         <p:nvSpPr>
-          <p:cNvPr id="2" name="Text 0"/>
-          <p:cNvSpPr txBox="1"/>
-          <p:nvPr/>
-        </p:nvSpPr>
-        <p:spPr>
-          <a:xfrm>
-            <a:off x="640080" y="502920"/>
-            <a:ext cx="7315200" cy="320040"/>
-          </a:xfrm>
-          <a:prstGeom prst="rect">
-            <a:avLst/>
-          </a:prstGeom>
-          <a:noFill/>
-          <a:ln/>
-        </p:spPr>
-        <p:txBody>
-          <a:bodyPr wrap="square" rtlCol="0" anchor="ctr"/>
-          <a:lstStyle/>
-          <a:p>
-            <a:pPr marL="0" indent="0">
-              <a:buNone/>
-            </a:pPr>
-            <a:r>
-              <a:rPr lang="en-US" sz="1300" b="1" kern="0" spc="300" dirty="0">
-                <a:solidFill>
-                  <a:srgbClr val="02C39A"/>
-                </a:solidFill>
-                <a:latin typeface="Calibri" pitchFamily="34" charset="0"/>
-                <a:ea typeface="Calibri" pitchFamily="34" charset="-122"/>
-                <a:cs typeface="Calibri" pitchFamily="34" charset="-120"/>
-              </a:rPr>
-              <a:t>THE 2026 SHIFT</a:t>
-            </a:r>
-            <a:endParaRPr lang="en-US" sz="1300" dirty="0"/>
-          </a:p>
-        </p:txBody>
-      </p:sp>
-      <p:sp>
-        <p:nvSpPr>
           <p:cNvPr id="3" name="Text 1"/>
           <p:cNvSpPr txBox="1"/>
           <p:nvPr/>
@@ -7434,7 +7778,7 @@
                 <a:ea typeface="Century Schoolbook" pitchFamily="34" charset="-122"/>
                 <a:cs typeface="Century Schoolbook" pitchFamily="34" charset="-120"/>
               </a:rPr>
-              <a:t>Geospatial becomes a first-class Parquet type</a:t>
+              <a:t>Geospatial incorporated into Parquet type</a:t>
             </a:r>
             <a:endParaRPr lang="en-US" sz="3400" dirty="0"/>
           </a:p>
@@ -9654,8 +9998,8 @@
         </p:nvSpPr>
         <p:spPr>
           <a:xfrm>
-            <a:off x="640080" y="804672"/>
-            <a:ext cx="10972800" cy="868680"/>
+            <a:off x="640079" y="804672"/>
+            <a:ext cx="11231575" cy="868680"/>
           </a:xfrm>
           <a:prstGeom prst="rect">
             <a:avLst/>
@@ -9679,7 +10023,7 @@
                 <a:ea typeface="Century Schoolbook" pitchFamily="34" charset="-122"/>
                 <a:cs typeface="Century Schoolbook" pitchFamily="34" charset="-120"/>
               </a:rPr>
-              <a:t>Creating &amp; using Parquet feature layers</a:t>
+              <a:t>Working with Parquet features in ArcGIS Online</a:t>
             </a:r>
             <a:endParaRPr lang="en-US" sz="3400" dirty="0"/>
           </a:p>

--- a/GeoParquet_Intro.pptx
+++ b/GeoParquet_Intro.pptx
@@ -291,9 +291,35 @@
           <a:bodyPr/>
           <a:lstStyle/>
           <a:p>
+            <a:pPr marL="171450" indent="-171450">
+              <a:buFont typeface="Arial" panose="020B0604020202020204" pitchFamily="34" charset="0"/>
+              <a:buChar char="•"/>
+            </a:pPr>
             <a:r>
               <a:rPr lang="en-US" dirty="0"/>
-              <a:t>Intro deck to Parquet and GeoParquet, with a focus on the 2026 developments: GeoParquet 2.0 / native Parquet geometry types, and Esri's June 2026 Parquet feature layer beta in ArcGIS Online.</a:t>
+              <a:t>I’ll give a little background on parquet </a:t>
+            </a:r>
+            <a:r>
+              <a:rPr lang="en-US" dirty="0" err="1"/>
+              <a:t>geoparquet</a:t>
+            </a:r>
+            <a:r>
+              <a:rPr lang="en-US" dirty="0"/>
+              <a:t> with a focus on the 2026 developments: </a:t>
+            </a:r>
+          </a:p>
+          <a:p>
+            <a:pPr marL="628650" lvl="1" indent="-171450">
+              <a:buFont typeface="Arial" panose="020B0604020202020204" pitchFamily="34" charset="0"/>
+              <a:buChar char="•"/>
+            </a:pPr>
+            <a:r>
+              <a:rPr lang="en-US" dirty="0" err="1"/>
+              <a:t>GeoParquet</a:t>
+            </a:r>
+            <a:r>
+              <a:rPr lang="en-US" dirty="0"/>
+              <a:t> 2.0 / native Parquet geometry types, and Esri's June 2026 Parquet feature layer beta in ArcGIS Online.</a:t>
             </a:r>
           </a:p>
         </p:txBody>
@@ -746,7 +772,7 @@
               <a:defRPr/>
             </a:pPr>
             <a:r>
-              <a:rPr lang="en-US" sz="1200" b="1" i="0" kern="1200">
+              <a:rPr lang="en-US" sz="1200" b="1" i="0" kern="1200" dirty="0">
                 <a:solidFill>
                   <a:schemeClr val="tx1"/>
                 </a:solidFill>
@@ -759,7 +785,7 @@
             </a:r>
           </a:p>
           <a:p>
-            <a:endParaRPr lang="en-US"/>
+            <a:endParaRPr lang="en-US" dirty="0"/>
           </a:p>
           <a:p>
             <a:r>
@@ -849,9 +875,23 @@
           <a:bodyPr/>
           <a:lstStyle/>
           <a:p>
+            <a:pPr marL="171450" indent="-171450">
+              <a:buFont typeface="Arial" panose="020B0604020202020204" pitchFamily="34" charset="0"/>
+              <a:buChar char="•"/>
+            </a:pPr>
             <a:r>
               <a:rPr lang="en-US" dirty="0"/>
-              <a:t>Parquet is columnar: it stores data by column, not row. That enables compression, column pruning, and metadata-driven skipping (min/max, null counts). Very cloud-friendly — clients request only the byte ranges they need.</a:t>
+              <a:t>Parquet is columnar: it stores data by column, not row. That enables compression, column pruning, and metadata-driven skipping (min/max, null counts). </a:t>
+            </a:r>
+          </a:p>
+          <a:p>
+            <a:pPr marL="171450" indent="-171450">
+              <a:buFont typeface="Arial" panose="020B0604020202020204" pitchFamily="34" charset="0"/>
+              <a:buChar char="•"/>
+            </a:pPr>
+            <a:r>
+              <a:rPr lang="en-US" dirty="0"/>
+              <a:t>Very cloud-friendly — clients request only the byte ranges they need.</a:t>
             </a:r>
           </a:p>
         </p:txBody>
@@ -936,9 +976,33 @@
           <a:bodyPr/>
           <a:lstStyle/>
           <a:p>
+            <a:pPr marL="171450" indent="-171450">
+              <a:buFont typeface="Arial" panose="020B0604020202020204" pitchFamily="34" charset="0"/>
+              <a:buChar char="•"/>
+            </a:pPr>
             <a:r>
               <a:rPr lang="en-US" dirty="0"/>
-              <a:t>GeoParquet = Parquet + geospatial metadata + geometry types. CRS, extent, geometry type stored in metadata; geometry column historically WKB. Over 20 tools in 6 languages support it.</a:t>
+              <a:t>GeoParquet = Parquet + geospatial metadata + geometry types. </a:t>
+            </a:r>
+          </a:p>
+          <a:p>
+            <a:pPr marL="171450" indent="-171450">
+              <a:buFont typeface="Arial" panose="020B0604020202020204" pitchFamily="34" charset="0"/>
+              <a:buChar char="•"/>
+            </a:pPr>
+            <a:r>
+              <a:rPr lang="en-US" dirty="0"/>
+              <a:t>CRS, extent, geometry type stored in metadata; geometry column historically WKB. </a:t>
+            </a:r>
+          </a:p>
+          <a:p>
+            <a:pPr marL="171450" indent="-171450">
+              <a:buFont typeface="Arial" panose="020B0604020202020204" pitchFamily="34" charset="0"/>
+              <a:buChar char="•"/>
+            </a:pPr>
+            <a:r>
+              <a:rPr lang="en-US" dirty="0"/>
+              <a:t>Over 20 tools in 6 languages support it.</a:t>
             </a:r>
           </a:p>
         </p:txBody>
@@ -1196,9 +1260,33 @@
           <a:bodyPr/>
           <a:lstStyle/>
           <a:p>
+            <a:pPr marL="171450" indent="-171450">
+              <a:buFont typeface="Arial" panose="020B0604020202020204" pitchFamily="34" charset="0"/>
+              <a:buChar char="•"/>
+            </a:pPr>
             <a:r>
               <a:rPr lang="en-US" dirty="0"/>
-              <a:t>Parquet 2.11 (March 2025) specified geospatial types &amp; statistics; the broader push through early 2026 made GEOMETRY/GEOGRAPHY first-class. Iceberg v3 adopted matching types. Bounding-box stats per row group enable spatial pruning.</a:t>
+              <a:t>Parquet 2.11 (March 2025) specified geospatial types &amp; statistics</a:t>
+            </a:r>
+          </a:p>
+          <a:p>
+            <a:pPr marL="171450" indent="-171450">
+              <a:buFont typeface="Arial" panose="020B0604020202020204" pitchFamily="34" charset="0"/>
+              <a:buChar char="•"/>
+            </a:pPr>
+            <a:r>
+              <a:rPr lang="en-US" dirty="0"/>
+              <a:t>the broader push through early 2026 made GEOMETRY/GEOGRAPHY first-class. </a:t>
+            </a:r>
+          </a:p>
+          <a:p>
+            <a:pPr marL="171450" indent="-171450">
+              <a:buFont typeface="Arial" panose="020B0604020202020204" pitchFamily="34" charset="0"/>
+              <a:buChar char="•"/>
+            </a:pPr>
+            <a:r>
+              <a:rPr lang="en-US" dirty="0"/>
+              <a:t>Bounding-box stats per row group enable spatial pruning.</a:t>
             </a:r>
           </a:p>
         </p:txBody>
@@ -1283,9 +1371,43 @@
           <a:bodyPr/>
           <a:lstStyle/>
           <a:p>
+            <a:pPr marL="171450" indent="-171450">
+              <a:buFont typeface="Arial" panose="020B0604020202020204" pitchFamily="34" charset="0"/>
+              <a:buChar char="•"/>
+            </a:pPr>
             <a:r>
               <a:rPr lang="en-US" dirty="0"/>
-              <a:t>GeoParquet 2.0 makes native Parquet GEOMETRY/GEOGRAPHY the foundation. Removes the GeoArrow native encoding and the bbox covering column from 1.1 (native stats replace it; files, esp. points, get smaller). Metadata remains as optional layer (e.g., guaranteed inline CRS). Guidance: stay on 1.1 in prod for now. v2.0.0 is an RC pending OGC approval.</a:t>
+              <a:t>GeoParquet 2.0 makes native Parquet GEOMETRY/GEOGRAPHY the foundation. </a:t>
+            </a:r>
+          </a:p>
+          <a:p>
+            <a:pPr marL="171450" indent="-171450">
+              <a:buFont typeface="Arial" panose="020B0604020202020204" pitchFamily="34" charset="0"/>
+              <a:buChar char="•"/>
+            </a:pPr>
+            <a:r>
+              <a:rPr lang="en-US" dirty="0"/>
+              <a:t>Removes the GeoArrow native encoding and the bbox covering column from 1.1 (native stats replace it; files, esp. points, get smaller)</a:t>
+            </a:r>
+          </a:p>
+          <a:p>
+            <a:pPr marL="171450" indent="-171450">
+              <a:buFont typeface="Arial" panose="020B0604020202020204" pitchFamily="34" charset="0"/>
+              <a:buChar char="•"/>
+            </a:pPr>
+            <a:r>
+              <a:rPr lang="en-US" dirty="0"/>
+              <a:t>Metadata remains as optional layer (e.g., guaranteed inline CRS). </a:t>
+            </a:r>
+          </a:p>
+          <a:p>
+            <a:pPr marL="171450" indent="-171450">
+              <a:buFont typeface="Arial" panose="020B0604020202020204" pitchFamily="34" charset="0"/>
+              <a:buChar char="•"/>
+            </a:pPr>
+            <a:r>
+              <a:rPr lang="en-US" dirty="0"/>
+              <a:t>Guidance: stay on 1.1 in prod for now. v2.0.0 is an RC pending OGC approval.</a:t>
             </a:r>
           </a:p>
         </p:txBody>
@@ -1370,9 +1492,43 @@
           <a:bodyPr/>
           <a:lstStyle/>
           <a:p>
+            <a:pPr marL="171450" indent="-171450">
+              <a:buFont typeface="Arial" panose="020B0604020202020204" pitchFamily="34" charset="0"/>
+              <a:buChar char="•"/>
+            </a:pPr>
             <a:r>
               <a:rPr lang="en-US" dirty="0"/>
-              <a:t>June 25, 2026 ArcGIS Online release: Parquet feature layers (Beta). Read-only, fast visualization + client-side querying, built on open GeoParquet. Created via ArcGIS Data Pipelines (no-code). Two optimizations: geographically adjacent storage and multi-scale generalized geometry. Additive metadata — still valid Parquet for other clients. Requires ArcGIS Maps SDK for JavaScript 5.1+.</a:t>
+              <a:t>June 25, 2026 ArcGIS Online release: Parquet feature layers (Beta). Read-only, fast visualization + client-side querying, built on open GeoParquet. </a:t>
+            </a:r>
+          </a:p>
+          <a:p>
+            <a:pPr marL="171450" indent="-171450">
+              <a:buFont typeface="Arial" panose="020B0604020202020204" pitchFamily="34" charset="0"/>
+              <a:buChar char="•"/>
+            </a:pPr>
+            <a:r>
+              <a:rPr lang="en-US" dirty="0"/>
+              <a:t>Created via ArcGIS Data Pipelines (no-code). </a:t>
+            </a:r>
+          </a:p>
+          <a:p>
+            <a:pPr marL="171450" indent="-171450">
+              <a:buFont typeface="Arial" panose="020B0604020202020204" pitchFamily="34" charset="0"/>
+              <a:buChar char="•"/>
+            </a:pPr>
+            <a:r>
+              <a:rPr lang="en-US" dirty="0"/>
+              <a:t>Two optimizations: geographically adjacent storage and multi-scale generalized geometry. </a:t>
+            </a:r>
+          </a:p>
+          <a:p>
+            <a:pPr marL="171450" indent="-171450">
+              <a:buFont typeface="Arial" panose="020B0604020202020204" pitchFamily="34" charset="0"/>
+              <a:buChar char="•"/>
+            </a:pPr>
+            <a:r>
+              <a:rPr lang="en-US" dirty="0"/>
+              <a:t>Additive metadata — still valid Parquet for other clients. Requires ArcGIS Maps SDK for JavaScript 5.1+.</a:t>
             </a:r>
           </a:p>
         </p:txBody>
@@ -1457,9 +1613,43 @@
           <a:bodyPr/>
           <a:lstStyle/>
           <a:p>
+            <a:pPr marL="171450" indent="-171450">
+              <a:buFont typeface="Arial" panose="020B0604020202020204" pitchFamily="34" charset="0"/>
+              <a:buChar char="•"/>
+            </a:pPr>
             <a:r>
               <a:rPr lang="en-US" dirty="0"/>
-              <a:t>Created only via ArcGIS Data Pipelines in this release; connects to S3, Azure, Snowflake, Databricks, BigQuery, URLs/APIs. Scheduled/on-demand overwrites. Best for large read-only reference data with big geometries. Beta limits: read-only, no offline, WGS84 only, no z/m, web-only (JS SDK 5.1+), not in Pro/Enterprise yet, no charts/analysis inputs.</a:t>
+              <a:t>Created only via ArcGIS Data Pipelines in this release; connects to S3, Azure, Snowflake, Databricks, BigQuery, URLs/APIs. </a:t>
+            </a:r>
+          </a:p>
+          <a:p>
+            <a:pPr marL="171450" indent="-171450">
+              <a:buFont typeface="Arial" panose="020B0604020202020204" pitchFamily="34" charset="0"/>
+              <a:buChar char="•"/>
+            </a:pPr>
+            <a:r>
+              <a:rPr lang="en-US" dirty="0"/>
+              <a:t>Scheduled/on-demand overwrites. </a:t>
+            </a:r>
+          </a:p>
+          <a:p>
+            <a:pPr marL="171450" indent="-171450">
+              <a:buFont typeface="Arial" panose="020B0604020202020204" pitchFamily="34" charset="0"/>
+              <a:buChar char="•"/>
+            </a:pPr>
+            <a:r>
+              <a:rPr lang="en-US" dirty="0"/>
+              <a:t>Best for large read-only reference data with big geometries. </a:t>
+            </a:r>
+          </a:p>
+          <a:p>
+            <a:pPr marL="171450" indent="-171450">
+              <a:buFont typeface="Arial" panose="020B0604020202020204" pitchFamily="34" charset="0"/>
+              <a:buChar char="•"/>
+            </a:pPr>
+            <a:r>
+              <a:rPr lang="en-US" dirty="0"/>
+              <a:t>Beta limits: read-only, no offline, WGS84 only, no z/m, web-only (JS SDK 5.1+), not in Pro/Enterprise yet, no charts/analysis inputs.</a:t>
             </a:r>
           </a:p>
         </p:txBody>
@@ -1544,6 +1734,10 @@
           <a:bodyPr/>
           <a:lstStyle/>
           <a:p>
+            <a:pPr marL="171450" indent="-171450">
+              <a:buFont typeface="Arial" panose="020B0604020202020204" pitchFamily="34" charset="0"/>
+              <a:buChar char="•"/>
+            </a:pPr>
             <a:r>
               <a:rPr lang="en-US" dirty="0"/>
               <a:t>Ecosystem: GDAL/OGR 3.12 reads/writes Parquet geo types; QGIS first-class; DuckDB SQL analytics; Iceberg v3 native types, Delta likely to follow; GeoPandas/PyArrow in Python; geoparquet-io (gpio), a 2026 CLI/Python tool for convert/validate/optimize (Hilbert ordering, ZSTD, bbox, spatial indices).</a:t>
